--- a/presentation/inspect-step-technical-overview-ru.pptx
+++ b/presentation/inspect-step-technical-overview-ru.pptx
@@ -4326,7 +4326,17 @@
             </a:r>
             <a:r>
               <a:rPr sz="1400"/>
-              <a:t> и template preview могут раскрыть чувствительные данные.</a:t>
+              <a:t> и template preview могут раскрыть чувствительные данные; </a:t>
+            </a:r>
+            <a:r>
+              <a:rPr sz="1400">
+                <a:latin typeface="Courier"/>
+              </a:rPr>
+              <a:t>r!</a:t>
+            </a:r>
+            <a:r>
+              <a:rPr sz="1400"/>
+              <a:t> также передаёт их callbacks и job logs.</a:t>
             </a:r>
           </a:p>
           <a:p>
@@ -4382,6 +4392,16 @@
                 <a:latin typeface="Courier"/>
               </a:rPr>
               <a:t>r</a:t>
+            </a:r>
+            <a:r>
+              <a:rPr sz="1400"/>
+              <a:t>, </a:t>
+            </a:r>
+            <a:r>
+              <a:rPr sz="1400">
+                <a:latin typeface="Courier"/>
+              </a:rPr>
+              <a:t>r!</a:t>
             </a:r>
             <a:r>
               <a:rPr sz="1400"/>
@@ -4862,7 +4882,7 @@
             <a:pPr lvl="0"/>
             <a:r>
               <a:rPr sz="1400"/>
-              <a:t>Управляет run/skip/go/continue, watches, breakpoints и result.</a:t>
+              <a:t>Управляет run/run!/skip/go/continue, watches, breakpoints и result.</a:t>
             </a:r>
           </a:p>
           <a:p>
@@ -5248,6 +5268,16 @@
               <a:rPr sz="1400">
                 <a:latin typeface="Courier"/>
               </a:rPr>
+              <a:t>r!</a:t>
+            </a:r>
+            <a:r>
+              <a:rPr sz="1400"/>
+              <a:t>, </a:t>
+            </a:r>
+            <a:r>
+              <a:rPr sz="1400">
+                <a:latin typeface="Courier"/>
+              </a:rPr>
               <a:t>s</a:t>
             </a:r>
             <a:r>
@@ -5403,6 +5433,16 @@
               <a:rPr sz="1400">
                 <a:latin typeface="Courier"/>
               </a:rPr>
+              <a:t>r!/run!</a:t>
+            </a:r>
+            <a:r>
+              <a:rPr sz="1400"/>
+              <a:t>, </a:t>
+            </a:r>
+            <a:r>
+              <a:rPr sz="1400">
+                <a:latin typeface="Courier"/>
+              </a:rPr>
               <a:t>s/skip</a:t>
             </a:r>
             <a:r>
@@ -5753,7 +5793,27 @@
             </a:r>
             <a:r>
               <a:rPr sz="1400"/>
-              <a:t> означает намеренно немаскированный вывод и требует осторожности.</a:t>
+              <a:t> означает намеренно немаскированный вывод и требует осторожности; </a:t>
+            </a:r>
+            <a:r>
+              <a:rPr sz="1400">
+                <a:latin typeface="Courier"/>
+              </a:rPr>
+              <a:t>r!</a:t>
+            </a:r>
+            <a:r>
+              <a:rPr sz="1400"/>
+              <a:t> временно отключает task-level </a:t>
+            </a:r>
+            <a:r>
+              <a:rPr sz="1400">
+                <a:latin typeface="Courier"/>
+              </a:rPr>
+              <a:t>no_log</a:t>
+            </a:r>
+            <a:r>
+              <a:rPr sz="1400"/>
+              <a:t>.</a:t>
             </a:r>
           </a:p>
         </p:txBody>
@@ -5944,6 +6004,8 @@
 SKIP: application : Restart service
 inspect-step&gt; r
 RUN: application : Configure service
+inspect-step&gt; r!
+# выполнить выбранную task с task-level no_log: false
 inspect-step&gt; c
 # выполнить текущую task и убрать обычные последующие остановки</a:t>
             </a:r>

--- a/presentation/inspect-step-technical-overview-ru.pptx
+++ b/presentation/inspect-step-technical-overview-ru.pptx
@@ -3290,11 +3290,14 @@
               <a:rPr sz="1400">
                 <a:latin typeface="Courier"/>
               </a:rPr>
-              <a:t>vars app_port                    # v — полный короткий alias
+              <a:t>vars app_port                    # v и var — короткие alias
 v app_config.workers depth=1
 vars hostvars.ansible_facts host=web02
-v role_*                         # glob top-level имён
+v glob=role_*                    # glob: * — любое количество символов
+v glob=role_[ab]                 # [ab] — один из двух символов
 vars regex=^(role|app)_[a-z0-9_]+$
+var app_password | length       # фильтр Ansible
+var app_config.workers + 2      # несколько значений
 vars depth=1                     # первый уровень всего контекста
 v ansible_facts host=web02 depth=2
 vars! app_config host=web02 depth=3
@@ -3325,17 +3328,27 @@
             </a:r>
             <a:r>
               <a:rPr sz="1400"/>
+              <a:t>, </a:t>
+            </a:r>
+            <a:r>
+              <a:rPr sz="1400">
+                <a:latin typeface="Courier"/>
+              </a:rPr>
+              <a:t>v</a:t>
+            </a:r>
+            <a:r>
+              <a:rPr sz="1400"/>
               <a:t> и </a:t>
             </a:r>
             <a:r>
               <a:rPr sz="1400">
                 <a:latin typeface="Courier"/>
               </a:rPr>
-              <a:t>v</a:t>
-            </a:r>
-            <a:r>
-              <a:rPr sz="1400"/>
-              <a:t> используют один parser и маскируют секреты по умолчанию.</a:t>
+              <a:t>var</a:t>
+            </a:r>
+            <a:r>
+              <a:rPr sz="1400"/>
+              <a:t> используют один parser; выражения вычисляются через Templar без lookups. Вычисленный скаляр может раскрыть секрет.</a:t>
             </a:r>
           </a:p>
           <a:p>
@@ -5525,17 +5538,17 @@
               <a:rPr sz="1400">
                 <a:latin typeface="Courier"/>
               </a:rPr>
-              <a:t>vars/v</a:t>
-            </a:r>
-            <a:r>
-              <a:rPr sz="1400"/>
-              <a:t>, явно немаскированная </a:t>
-            </a:r>
-            <a:r>
-              <a:rPr sz="1400">
-                <a:latin typeface="Courier"/>
-              </a:rPr>
-              <a:t>vars!/v!</a:t>
+              <a:t>vars/v/var</a:t>
+            </a:r>
+            <a:r>
+              <a:rPr sz="1400"/>
+              <a:t>, выражения Jinja, явно немаскированные </a:t>
+            </a:r>
+            <a:r>
+              <a:rPr sz="1400">
+                <a:latin typeface="Courier"/>
+              </a:rPr>
+              <a:t>vars!/v!/var!</a:t>
             </a:r>
             <a:r>
               <a:rPr sz="1400"/>
